--- a/banner_tcc.pptx
+++ b/banner_tcc.pptx
@@ -14236,7 +14236,7 @@
         </p:nvSpPr>
         <p:spPr>
           <a:xfrm>
-            <a:off x="1524234" y="10685518"/>
+            <a:off x="1519177" y="11783221"/>
             <a:ext cx="12717681" cy="2912301"/>
           </a:xfrm>
           <a:prstGeom prst="rect">
@@ -14261,100 +14261,56 @@
           </a:bodyPr>
           <a:lstStyle/>
           <a:p>
-            <a:pPr lvl="0"/>
-            <a:r>
-              <a:rPr lang="pt-BR" sz="5400" dirty="0">
-                <a:solidFill>
-                  <a:schemeClr val="dk1"/>
-                </a:solidFill>
-                <a:latin typeface="+mn-lt"/>
-                <a:ea typeface="Calibri" panose="020F0502020204030204"/>
-                <a:cs typeface="Calibri" panose="020F0502020204030204"/>
-                <a:sym typeface="Calibri" panose="020F0502020204030204"/>
-              </a:rPr>
+            <a:r>
+              <a:rPr lang="pt-BR" sz="3200" dirty="0"/>
               <a:t>O fenômeno "vibe </a:t>
             </a:r>
             <a:r>
-              <a:rPr lang="pt-BR" sz="5400" dirty="0" err="1">
-                <a:solidFill>
-                  <a:schemeClr val="dk1"/>
-                </a:solidFill>
-                <a:latin typeface="+mn-lt"/>
-                <a:ea typeface="Calibri" panose="020F0502020204030204"/>
-                <a:cs typeface="Calibri" panose="020F0502020204030204"/>
-                <a:sym typeface="Calibri" panose="020F0502020204030204"/>
-              </a:rPr>
+              <a:rPr lang="pt-BR" sz="3200" dirty="0" err="1"/>
               <a:t>coding</a:t>
             </a:r>
             <a:r>
-              <a:rPr lang="pt-BR" sz="5400" dirty="0">
-                <a:solidFill>
-                  <a:schemeClr val="dk1"/>
-                </a:solidFill>
-                <a:latin typeface="+mn-lt"/>
-                <a:ea typeface="Calibri" panose="020F0502020204030204"/>
-                <a:cs typeface="Calibri" panose="020F0502020204030204"/>
-                <a:sym typeface="Calibri" panose="020F0502020204030204"/>
-              </a:rPr>
-              <a:t>" caracteriza-se pelo desenvolvimento acelerado com auxílio massivo de ferramentas de IA generativa (GitHub </a:t>
-            </a:r>
-            <a:r>
-              <a:rPr lang="pt-BR" sz="5400" dirty="0" err="1">
-                <a:solidFill>
-                  <a:schemeClr val="dk1"/>
-                </a:solidFill>
-                <a:latin typeface="+mn-lt"/>
-                <a:ea typeface="Calibri" panose="020F0502020204030204"/>
-                <a:cs typeface="Calibri" panose="020F0502020204030204"/>
-                <a:sym typeface="Calibri" panose="020F0502020204030204"/>
-              </a:rPr>
+              <a:rPr lang="pt-BR" sz="3200" dirty="0"/>
+              <a:t>" representa uma transformação radical na forma como software é desenvolvido na era contemporânea. Caracteriza-se fundamentalmente pelo desenvolvimento acelerado de aplicações com auxílio massivo de ferramentas de Inteligência Artificial generativa, incluindo GitHub </a:t>
+            </a:r>
+            <a:r>
+              <a:rPr lang="pt-BR" sz="3200" dirty="0" err="1"/>
               <a:t>Copilot</a:t>
             </a:r>
             <a:r>
-              <a:rPr lang="pt-BR" sz="5400" dirty="0">
-                <a:solidFill>
-                  <a:schemeClr val="dk1"/>
-                </a:solidFill>
-                <a:latin typeface="+mn-lt"/>
-                <a:ea typeface="Calibri" panose="020F0502020204030204"/>
-                <a:cs typeface="Calibri" panose="020F0502020204030204"/>
-                <a:sym typeface="Calibri" panose="020F0502020204030204"/>
-              </a:rPr>
+              <a:rPr lang="pt-BR" sz="3200" dirty="0"/>
               <a:t>, </a:t>
             </a:r>
             <a:r>
-              <a:rPr lang="pt-BR" sz="5400" dirty="0" err="1">
-                <a:solidFill>
-                  <a:schemeClr val="dk1"/>
-                </a:solidFill>
-                <a:latin typeface="+mn-lt"/>
-                <a:ea typeface="Calibri" panose="020F0502020204030204"/>
-                <a:cs typeface="Calibri" panose="020F0502020204030204"/>
-                <a:sym typeface="Calibri" panose="020F0502020204030204"/>
-              </a:rPr>
+              <a:rPr lang="pt-BR" sz="3200" dirty="0" err="1"/>
               <a:t>ChatGPT</a:t>
             </a:r>
             <a:r>
-              <a:rPr lang="pt-BR" sz="5400" dirty="0">
-                <a:solidFill>
-                  <a:schemeClr val="dk1"/>
-                </a:solidFill>
-                <a:latin typeface="+mn-lt"/>
-                <a:ea typeface="Calibri" panose="020F0502020204030204"/>
-                <a:cs typeface="Calibri" panose="020F0502020204030204"/>
-                <a:sym typeface="Calibri" panose="020F0502020204030204"/>
-              </a:rPr>
-              <a:t>, Claude), priorizando velocidade sobre práticas consolidadas de engenharia de software. Esta pesquisa investiga como essa abordagem contribui para o acúmulo de dívidas técnicas, termo cunhado por Ward Cunningham (1992) que representa o custo implícito </a:t>
-            </a:r>
-            <a:endParaRPr sz="5400" b="0" i="0" u="none" strike="noStrike" cap="none" dirty="0">
-              <a:solidFill>
-                <a:schemeClr val="dk1"/>
-              </a:solidFill>
-              <a:latin typeface="+mn-lt"/>
-              <a:ea typeface="Calibri" panose="020F0502020204030204"/>
-              <a:cs typeface="Calibri" panose="020F0502020204030204"/>
-              <a:sym typeface="Calibri" panose="020F0502020204030204"/>
-            </a:endParaRPr>
+              <a:rPr lang="pt-BR" sz="3200" dirty="0"/>
+              <a:t> e Claude, priorizando sistematicamente a velocidade de entrega em detrimento de práticas consolidadas de engenharia de software. Esta abordagem, embora permita a materialização rápida de ideias e conceitos, especialmente em ambientes de startups e empresas de Software as a Service (SaaS), introduz riscos significativos e potencialmente catastróficos relacionados à qualidade, segurança e sustentabilidade do código produzido.</a:t>
+            </a:r>
+          </a:p>
+          <a:p>
+            <a:r>
+              <a:rPr lang="pt-BR" sz="3200" dirty="0"/>
+              <a:t>O conceito de dívida técnica, proposto inicialmente por Ward Cunningham em 1992, refere-se ao custo implícito de retrabalho causado pela escolha deliberada ou inadvertida de soluções rápidas e superficiais em vez de implementações mais robustas, bem fundamentadas e sustentáveis. No contexto específico do vibe </a:t>
+            </a:r>
+            <a:r>
+              <a:rPr lang="pt-BR" sz="3200" dirty="0" err="1"/>
+              <a:t>coding</a:t>
+            </a:r>
+            <a:r>
+              <a:rPr lang="pt-BR" sz="3200" dirty="0"/>
+              <a:t>, essa dívida manifesta-se de forma particularmente preocupante e insidiosa, pois desenvolvedores frequentemente incorporam código gerado por sistemas de IA sem compreensão profunda de suas implicações arquiteturais, de segurança ou de </a:t>
+            </a:r>
+            <a:r>
+              <a:rPr lang="pt-BR" sz="3200" dirty="0" err="1"/>
+              <a:t>manutenibilidade</a:t>
+            </a:r>
+            <a:r>
+              <a:rPr lang="pt-BR" sz="3200" dirty="0"/>
+              <a:t>, criando um passivo técnico que se acumula de forma acelerada e muitas vezes invisível.</a:t>
+            </a:r>
           </a:p>
         </p:txBody>
       </p:sp>
@@ -14539,7 +14495,7 @@
         </p:nvSpPr>
         <p:spPr>
           <a:xfrm>
-            <a:off x="1524234" y="18151051"/>
+            <a:off x="17097938" y="7658767"/>
             <a:ext cx="12717681" cy="7325443"/>
           </a:xfrm>
           <a:prstGeom prst="rect">
@@ -14557,120 +14513,41 @@
           <a:lstStyle/>
           <a:p>
             <a:r>
-              <a:rPr lang="pt-BR" sz="3600" dirty="0" smtClean="0">
-                <a:latin typeface="+mn-lt"/>
-                <a:cs typeface="Calibri" panose="020F0502020204030204" pitchFamily="34" charset="0"/>
-              </a:rPr>
-              <a:t>Investigar </a:t>
-            </a:r>
-            <a:r>
-              <a:rPr lang="pt-BR" sz="3600" dirty="0">
-                <a:latin typeface="+mn-lt"/>
-                <a:cs typeface="Calibri" panose="020F0502020204030204" pitchFamily="34" charset="0"/>
-              </a:rPr>
-              <a:t>a relação entre vibe </a:t>
-            </a:r>
-            <a:r>
-              <a:rPr lang="pt-BR" sz="3600" dirty="0" err="1">
-                <a:latin typeface="+mn-lt"/>
-                <a:cs typeface="Calibri" panose="020F0502020204030204" pitchFamily="34" charset="0"/>
-              </a:rPr>
-              <a:t>coding</a:t>
-            </a:r>
-            <a:r>
-              <a:rPr lang="pt-BR" sz="3600" dirty="0">
-                <a:latin typeface="+mn-lt"/>
-                <a:cs typeface="Calibri" panose="020F0502020204030204" pitchFamily="34" charset="0"/>
-              </a:rPr>
-              <a:t> e acúmulo de dívidas técnicas, analisando impactos na qualidade, segurança e sustentabilidade de software através de metodologia qualitativa exploratória.</a:t>
-            </a:r>
-          </a:p>
-          <a:p>
-            <a:r>
-              <a:rPr lang="pt-BR" sz="3600" dirty="0" smtClean="0">
-                <a:latin typeface="+mn-lt"/>
-                <a:cs typeface="Calibri" panose="020F0502020204030204" pitchFamily="34" charset="0"/>
-              </a:rPr>
-              <a:t>- Caracterizar </a:t>
-            </a:r>
-            <a:r>
-              <a:rPr lang="pt-BR" sz="3600" dirty="0">
-                <a:latin typeface="+mn-lt"/>
-                <a:cs typeface="Calibri" panose="020F0502020204030204" pitchFamily="34" charset="0"/>
-              </a:rPr>
-              <a:t>o fenômeno do vibe </a:t>
-            </a:r>
-            <a:r>
-              <a:rPr lang="pt-BR" sz="3600" dirty="0" err="1">
-                <a:latin typeface="+mn-lt"/>
-                <a:cs typeface="Calibri" panose="020F0502020204030204" pitchFamily="34" charset="0"/>
-              </a:rPr>
-              <a:t>coding</a:t>
-            </a:r>
-            <a:r>
-              <a:rPr lang="pt-BR" sz="3600" dirty="0">
-                <a:latin typeface="+mn-lt"/>
-                <a:cs typeface="Calibri" panose="020F0502020204030204" pitchFamily="34" charset="0"/>
-              </a:rPr>
-              <a:t> no desenvolvimento contemporâneo</a:t>
-            </a:r>
-          </a:p>
-          <a:p>
-            <a:r>
-              <a:rPr lang="pt-BR" sz="3600" dirty="0" smtClean="0">
-                <a:latin typeface="+mn-lt"/>
-                <a:cs typeface="Calibri" panose="020F0502020204030204" pitchFamily="34" charset="0"/>
-              </a:rPr>
-              <a:t>- Mapear </a:t>
-            </a:r>
-            <a:r>
-              <a:rPr lang="pt-BR" sz="3600" dirty="0">
-                <a:latin typeface="+mn-lt"/>
-                <a:cs typeface="Calibri" panose="020F0502020204030204" pitchFamily="34" charset="0"/>
-              </a:rPr>
-              <a:t>categorias de dívidas técnicas usando taxonomia de Alves et al. (2016)</a:t>
-            </a:r>
-          </a:p>
-          <a:p>
-            <a:r>
-              <a:rPr lang="pt-BR" sz="3600" dirty="0" smtClean="0">
-                <a:latin typeface="+mn-lt"/>
-                <a:cs typeface="Calibri" panose="020F0502020204030204" pitchFamily="34" charset="0"/>
-              </a:rPr>
-              <a:t>- Identificar </a:t>
-            </a:r>
-            <a:r>
-              <a:rPr lang="pt-BR" sz="3600" dirty="0">
-                <a:latin typeface="+mn-lt"/>
-                <a:cs typeface="Calibri" panose="020F0502020204030204" pitchFamily="34" charset="0"/>
-              </a:rPr>
-              <a:t>vulnerabilidades de segurança em código gerado por IA</a:t>
-            </a:r>
-          </a:p>
-          <a:p>
-            <a:r>
-              <a:rPr lang="pt-BR" sz="3600" dirty="0" smtClean="0">
-                <a:latin typeface="+mn-lt"/>
-                <a:cs typeface="Calibri" panose="020F0502020204030204" pitchFamily="34" charset="0"/>
-              </a:rPr>
-              <a:t>- Documentar </a:t>
-            </a:r>
-            <a:r>
-              <a:rPr lang="pt-BR" sz="3600" dirty="0">
-                <a:latin typeface="+mn-lt"/>
-                <a:cs typeface="Calibri" panose="020F0502020204030204" pitchFamily="34" charset="0"/>
-              </a:rPr>
-              <a:t>o fenômeno do "Ciclo de Validação Falso"</a:t>
-            </a:r>
-          </a:p>
-          <a:p>
-            <a:r>
-              <a:rPr lang="pt-BR" sz="3600" dirty="0">
-                <a:latin typeface="+mn-lt"/>
-                <a:cs typeface="Calibri" panose="020F0502020204030204" pitchFamily="34" charset="0"/>
-              </a:rPr>
-              <a:t>Propor framework de diretrizes em três níveis de mitigação</a:t>
-            </a:r>
+              <a:rPr lang="pt-BR" sz="3200" dirty="0" smtClean="0"/>
+              <a:t>Identificou-se </a:t>
+            </a:r>
+            <a:r>
+              <a:rPr lang="pt-BR" sz="3200" dirty="0"/>
+              <a:t>que todos os 5 profissionais entrevistados utilizam IA generativa diariamente, principalmente </a:t>
+            </a:r>
+            <a:r>
+              <a:rPr lang="pt-BR" sz="3200" dirty="0" err="1"/>
+              <a:t>ChatGPT</a:t>
+            </a:r>
+            <a:r>
+              <a:rPr lang="pt-BR" sz="3200" dirty="0"/>
+              <a:t> e GitHub </a:t>
+            </a:r>
+            <a:r>
+              <a:rPr lang="pt-BR" sz="3200" dirty="0" err="1"/>
+              <a:t>Copilot</a:t>
+            </a:r>
+            <a:r>
+              <a:rPr lang="pt-BR" sz="3200" dirty="0"/>
+              <a:t>, com impacto direto na velocidade de entrega. O uso mais comum ocorre para geração de </a:t>
+            </a:r>
+            <a:r>
+              <a:rPr lang="pt-BR" sz="3200" dirty="0" err="1"/>
+              <a:t>boilerplate</a:t>
+            </a:r>
+            <a:r>
+              <a:rPr lang="pt-BR" sz="3200" dirty="0"/>
+              <a:t>, implementação rápida de funcionalidades conhecidas e compreensão de bibliotecas, mas frequentemente cria dependência e sensação artificial de domínio técnico. Embora todos percebam ganho expressivo de produtividade, esse ganho vem acompanhado de acúmulo de dívidas técnicas, especialmente quando o código gerado não é revisado de forma rigorosa — algo relatado pela maioria dos participantes. Os achados mostram que práticas como revisão superficial, confiança excessiva em respostas da IA e adoção acelerada de soluções prontas contribuem para introdução recorrente de bugs, inconsistências arquiteturais e fragilidades de segurança. Também foi identificado o fenômeno do “ciclo de validação falso”, em que testes gerados pela própria IA mascaram defeitos por meio de falsos positivos, criando sensação enganosa de qualidade. As evidências foram reforçadas pela triangulação com documentos públicos e com o estudo de caso analisado, revelando padrões similares de falhas técnicas. Em conjunto, os resultados indicam que o desenvolvimento acelerado com IA eleva a produtividade imediata, mas amplia riscos de qualidade e segurança quando não acompanhado de práticas de mitigação estruturadas.</a:t>
+            </a:r>
+            <a:endParaRPr lang="pt-BR" sz="3200" dirty="0">
+              <a:latin typeface="+mn-lt"/>
+              <a:cs typeface="Calibri" panose="020F0502020204030204" pitchFamily="34" charset="0"/>
+            </a:endParaRPr>
           </a:p>
         </p:txBody>
       </p:sp>
@@ -14744,7 +14621,7 @@
         </p:nvSpPr>
         <p:spPr>
           <a:xfrm>
-            <a:off x="5512098" y="9985570"/>
+            <a:off x="1514121" y="20172658"/>
             <a:ext cx="13979147" cy="11910953"/>
           </a:xfrm>
           <a:prstGeom prst="rect">
@@ -14761,40 +14638,93 @@
           </a:bodyPr>
           <a:lstStyle/>
           <a:p>
-            <a:pPr marL="0" lvl="0" indent="0" algn="l" rtl="0">
-              <a:spcBef>
-                <a:spcPts val="0"/>
-              </a:spcBef>
-              <a:spcAft>
-                <a:spcPts val="0"/>
-              </a:spcAft>
-              <a:buNone/>
-            </a:pPr>
-            <a:endParaRPr sz="2400" dirty="0">
-              <a:solidFill>
-                <a:schemeClr val="dk1"/>
-              </a:solidFill>
-            </a:endParaRPr>
+            <a:r>
+              <a:rPr lang="pt-BR" sz="3200" dirty="0"/>
+              <a:t>Investigar como a prática de </a:t>
+            </a:r>
+            <a:r>
+              <a:rPr lang="pt-BR" sz="3200" i="1" dirty="0"/>
+              <a:t>vibe </a:t>
+            </a:r>
+            <a:r>
+              <a:rPr lang="pt-BR" sz="3200" i="1" dirty="0" err="1"/>
+              <a:t>coding</a:t>
+            </a:r>
+            <a:r>
+              <a:rPr lang="pt-BR" sz="3200" dirty="0"/>
+              <a:t> (desenvolvimento acelerado assistido por IA) contribui para o acúmulo de dívidas técnicas e seus impactos na qualidade, segurança e sustentabilidade de software.</a:t>
+            </a:r>
           </a:p>
           <a:p>
-            <a:pPr marL="0" marR="0" lvl="0" indent="0" algn="l" rtl="0">
-              <a:spcBef>
-                <a:spcPts val="0"/>
-              </a:spcBef>
-              <a:spcAft>
-                <a:spcPts val="0"/>
-              </a:spcAft>
-              <a:buNone/>
-            </a:pPr>
-            <a:endParaRPr sz="2400" dirty="0">
-              <a:solidFill>
-                <a:schemeClr val="dk1"/>
-              </a:solidFill>
-              <a:latin typeface="Arial" panose="020B0604020202020204"/>
-              <a:ea typeface="Arial" panose="020B0604020202020204"/>
-              <a:cs typeface="Arial" panose="020B0604020202020204"/>
-              <a:sym typeface="Arial" panose="020B0604020202020204"/>
-            </a:endParaRPr>
+            <a:r>
+              <a:rPr lang="pt-BR" sz="3200" b="1" dirty="0"/>
+              <a:t>Objetivos específicos</a:t>
+            </a:r>
+            <a:endParaRPr lang="pt-BR" sz="3200" dirty="0"/>
+          </a:p>
+          <a:p>
+            <a:r>
+              <a:rPr lang="pt-BR" sz="3200" b="1" dirty="0"/>
+              <a:t>Caracterizar o vibe </a:t>
+            </a:r>
+            <a:r>
+              <a:rPr lang="pt-BR" sz="3200" b="1" dirty="0" err="1"/>
+              <a:t>coding</a:t>
+            </a:r>
+            <a:r>
+              <a:rPr lang="pt-BR" sz="3200" dirty="0"/>
+              <a:t> — mapear práticas, motivações e ferramentas de IA usadas, e mensurar impacto percebido em produtividade e qualidade.</a:t>
+            </a:r>
+          </a:p>
+          <a:p>
+            <a:r>
+              <a:rPr lang="pt-BR" sz="3200" b="1" dirty="0"/>
+              <a:t>Classificar dívidas técnicas</a:t>
+            </a:r>
+            <a:r>
+              <a:rPr lang="pt-BR" sz="3200" dirty="0"/>
+              <a:t> — aplicar a taxonomia de Alves et al. (2016) para identificar e quantificar categorias de dívida mais comuns em projetos assistidos por IA versus tradicionais.</a:t>
+            </a:r>
+          </a:p>
+          <a:p>
+            <a:r>
+              <a:rPr lang="pt-BR" sz="3200" b="1" dirty="0"/>
+              <a:t>Analisar vulnerabilidades recorrentes</a:t>
+            </a:r>
+            <a:r>
+              <a:rPr lang="pt-BR" sz="3200" dirty="0"/>
+              <a:t> — identificar padrões e causas raiz de falhas de segurança em código gerado por IA e dificuldades na sua detecção em revisões.</a:t>
+            </a:r>
+          </a:p>
+          <a:p>
+            <a:r>
+              <a:rPr lang="pt-BR" sz="3200" b="1" dirty="0"/>
+              <a:t>Documentar o “Ciclo de Validação Falso”</a:t>
+            </a:r>
+            <a:r>
+              <a:rPr lang="pt-BR" sz="3200" dirty="0"/>
+              <a:t> — caracterizar como testes automatizados gerados por IA geram falsos positivos e ocultam defeitos; medir frequência e impacto.</a:t>
+            </a:r>
+          </a:p>
+          <a:p>
+            <a:r>
+              <a:rPr lang="pt-BR" sz="3200" b="1" dirty="0"/>
+              <a:t>Propor um framework de mitigação</a:t>
+            </a:r>
+            <a:r>
+              <a:rPr lang="pt-BR" sz="3200" dirty="0"/>
+              <a:t> — definir diretrizes práticas em três níveis (individual, equipe, organização) para equilibrar produtividade e qualidade a longo prazo.</a:t>
+            </a:r>
+          </a:p>
+          <a:p>
+            <a:r>
+              <a:rPr lang="pt-BR" sz="3200" b="1" dirty="0"/>
+              <a:t>Avaliar percepções profissionais</a:t>
+            </a:r>
+            <a:r>
+              <a:rPr lang="pt-BR" sz="3200" dirty="0"/>
+              <a:t> — investigar níveis de consciência sobre riscos/benefícios e práticas informais de mitigação adotadas por desenvolvedores e equipes.</a:t>
+            </a:r>
           </a:p>
         </p:txBody>
       </p:sp>
@@ -14968,7 +14898,7 @@
         </p:nvSpPr>
         <p:spPr>
           <a:xfrm>
-            <a:off x="1524234" y="29172380"/>
+            <a:off x="1519177" y="32172098"/>
             <a:ext cx="12727794" cy="5532286"/>
           </a:xfrm>
           <a:prstGeom prst="rect">
@@ -14994,196 +14924,46 @@
           <a:lstStyle/>
           <a:p>
             <a:r>
-              <a:rPr lang="pt-BR" sz="4800" dirty="0">
-                <a:latin typeface="+mn-lt"/>
-                <a:cs typeface="Calibri" panose="020F0502020204030204" pitchFamily="34" charset="0"/>
-              </a:rPr>
-              <a:t>Pesquisa qualitativa exploratória com triangulação de dados.</a:t>
+              <a:rPr lang="pt-BR" sz="3200" dirty="0" smtClean="0"/>
+              <a:t>Adota-se a abordagem </a:t>
+            </a:r>
+            <a:r>
+              <a:rPr lang="pt-BR" sz="3200" dirty="0"/>
+              <a:t>exploratória e qualitativa para investigar o </a:t>
+            </a:r>
+            <a:r>
+              <a:rPr lang="pt-BR" sz="3200" i="1" dirty="0"/>
+              <a:t>vibe </a:t>
+            </a:r>
+            <a:r>
+              <a:rPr lang="pt-BR" sz="3200" i="1" dirty="0" err="1"/>
+              <a:t>coding</a:t>
+            </a:r>
+            <a:r>
+              <a:rPr lang="pt-BR" sz="3200" dirty="0"/>
+              <a:t>, fenômeno recente ligado ao uso intensivo de IA no desenvolvimento de software. A amostra, selecionada intencionalmente, inclui cinco profissionais brasileiros (quatro desenvolvedores e um arquiteto), permitindo captar tanto práticas do dia a dia quanto visão de arquitetura.</a:t>
             </a:r>
           </a:p>
           <a:p>
             <a:r>
-              <a:rPr lang="pt-BR" sz="4800" b="1" dirty="0">
-                <a:latin typeface="+mn-lt"/>
-                <a:cs typeface="Calibri" panose="020F0502020204030204" pitchFamily="34" charset="0"/>
-              </a:rPr>
-              <a:t>5 entrevistas semiestruturadas</a:t>
-            </a:r>
-            <a:r>
-              <a:rPr lang="pt-BR" sz="4800" dirty="0">
-                <a:latin typeface="+mn-lt"/>
-                <a:cs typeface="Calibri" panose="020F0502020204030204" pitchFamily="34" charset="0"/>
-              </a:rPr>
-              <a:t> via Google </a:t>
-            </a:r>
-            <a:r>
-              <a:rPr lang="pt-BR" sz="4800" dirty="0" err="1">
-                <a:latin typeface="+mn-lt"/>
-                <a:cs typeface="Calibri" panose="020F0502020204030204" pitchFamily="34" charset="0"/>
-              </a:rPr>
+              <a:rPr lang="pt-BR" sz="3200" dirty="0"/>
+              <a:t>Os dados foram coletados por meio de entrevistas semiestruturadas anônimas via Google </a:t>
+            </a:r>
+            <a:r>
+              <a:rPr lang="pt-BR" sz="3200" dirty="0" err="1"/>
               <a:t>Forms</a:t>
             </a:r>
-            <a:endParaRPr lang="pt-BR" sz="4800" dirty="0">
-              <a:latin typeface="+mn-lt"/>
-              <a:cs typeface="Calibri" panose="020F0502020204030204" pitchFamily="34" charset="0"/>
-            </a:endParaRPr>
-          </a:p>
-          <a:p>
-            <a:r>
-              <a:rPr lang="pt-BR" sz="4800" dirty="0" smtClean="0">
-                <a:latin typeface="+mn-lt"/>
-                <a:cs typeface="Calibri" panose="020F0502020204030204" pitchFamily="34" charset="0"/>
-              </a:rPr>
-              <a:t>- Análise </a:t>
-            </a:r>
-            <a:r>
-              <a:rPr lang="pt-BR" sz="4800" dirty="0">
-                <a:latin typeface="+mn-lt"/>
-                <a:cs typeface="Calibri" panose="020F0502020204030204" pitchFamily="34" charset="0"/>
-              </a:rPr>
-              <a:t>documental de relatórios técnicos</a:t>
-            </a:r>
-          </a:p>
-          <a:p>
-            <a:r>
-              <a:rPr lang="pt-BR" sz="4800" dirty="0" smtClean="0">
-                <a:latin typeface="+mn-lt"/>
-                <a:cs typeface="Calibri" panose="020F0502020204030204" pitchFamily="34" charset="0"/>
-              </a:rPr>
-              <a:t>- Estudo </a:t>
-            </a:r>
-            <a:r>
-              <a:rPr lang="pt-BR" sz="4800" dirty="0">
-                <a:latin typeface="+mn-lt"/>
-                <a:cs typeface="Calibri" panose="020F0502020204030204" pitchFamily="34" charset="0"/>
-              </a:rPr>
-              <a:t>de caso de vazamento de dados</a:t>
-            </a:r>
-          </a:p>
-          <a:p>
-            <a:r>
-              <a:rPr lang="pt-BR" sz="4800" dirty="0" smtClean="0">
-                <a:latin typeface="+mn-lt"/>
-                <a:cs typeface="Calibri" panose="020F0502020204030204" pitchFamily="34" charset="0"/>
-              </a:rPr>
-              <a:t>- Análise </a:t>
-            </a:r>
-            <a:r>
-              <a:rPr lang="pt-BR" sz="4800" dirty="0">
-                <a:latin typeface="+mn-lt"/>
-                <a:cs typeface="Calibri" panose="020F0502020204030204" pitchFamily="34" charset="0"/>
-              </a:rPr>
-              <a:t>de Conteúdo Temática (</a:t>
-            </a:r>
-            <a:r>
-              <a:rPr lang="pt-BR" sz="4800" dirty="0" err="1">
-                <a:latin typeface="+mn-lt"/>
-                <a:cs typeface="Calibri" panose="020F0502020204030204" pitchFamily="34" charset="0"/>
-              </a:rPr>
+            <a:r>
+              <a:rPr lang="pt-BR" sz="3200" dirty="0"/>
+              <a:t>, complementadas por análise de documentos técnicos, discussões em comunidades especializadas e um estudo de caso de incidente real de segurança. A análise seguiu a metodologia de Análise de Conteúdo Temática de </a:t>
+            </a:r>
+            <a:r>
+              <a:rPr lang="pt-BR" sz="3200" dirty="0" err="1"/>
               <a:t>Braun</a:t>
             </a:r>
             <a:r>
-              <a:rPr lang="pt-BR" sz="4800" dirty="0">
-                <a:latin typeface="+mn-lt"/>
-                <a:cs typeface="Calibri" panose="020F0502020204030204" pitchFamily="34" charset="0"/>
-              </a:rPr>
-              <a:t> &amp; Clarke, 2006)</a:t>
-            </a:r>
-          </a:p>
-          <a:p>
-            <a:r>
-              <a:rPr lang="pt-BR" sz="4800" b="1" dirty="0">
-                <a:latin typeface="+mn-lt"/>
-                <a:cs typeface="Calibri" panose="020F0502020204030204" pitchFamily="34" charset="0"/>
-              </a:rPr>
-              <a:t>Amostra:</a:t>
-            </a:r>
-            <a:r>
-              <a:rPr lang="pt-BR" sz="4800" dirty="0">
-                <a:latin typeface="+mn-lt"/>
-                <a:cs typeface="Calibri" panose="020F0502020204030204" pitchFamily="34" charset="0"/>
-              </a:rPr>
-              <a:t> Profissionais de desenvolvimento de software</a:t>
-            </a:r>
-          </a:p>
-          <a:p>
-            <a:r>
-              <a:rPr lang="pt-BR" sz="4800" dirty="0" smtClean="0">
-                <a:latin typeface="+mn-lt"/>
-                <a:cs typeface="Calibri" panose="020F0502020204030204" pitchFamily="34" charset="0"/>
-              </a:rPr>
-              <a:t>- 4 </a:t>
-            </a:r>
-            <a:r>
-              <a:rPr lang="pt-BR" sz="4800" dirty="0">
-                <a:latin typeface="+mn-lt"/>
-                <a:cs typeface="Calibri" panose="020F0502020204030204" pitchFamily="34" charset="0"/>
-              </a:rPr>
-              <a:t>Desenvolvedores (júnior a sênior)</a:t>
-            </a:r>
-          </a:p>
-          <a:p>
-            <a:r>
-              <a:rPr lang="pt-BR" sz="4800" dirty="0" smtClean="0">
-                <a:latin typeface="+mn-lt"/>
-                <a:cs typeface="Calibri" panose="020F0502020204030204" pitchFamily="34" charset="0"/>
-              </a:rPr>
-              <a:t>- 1 </a:t>
-            </a:r>
-            <a:r>
-              <a:rPr lang="pt-BR" sz="4800" dirty="0">
-                <a:latin typeface="+mn-lt"/>
-                <a:cs typeface="Calibri" panose="020F0502020204030204" pitchFamily="34" charset="0"/>
-              </a:rPr>
-              <a:t>Arquiteto de Software</a:t>
-            </a:r>
-          </a:p>
-          <a:p>
-            <a:r>
-              <a:rPr lang="pt-BR" sz="4800" dirty="0" smtClean="0">
-                <a:latin typeface="+mn-lt"/>
-                <a:cs typeface="Calibri" panose="020F0502020204030204" pitchFamily="34" charset="0"/>
-              </a:rPr>
-              <a:t>- Experiência</a:t>
-            </a:r>
-            <a:r>
-              <a:rPr lang="pt-BR" sz="4800" dirty="0">
-                <a:latin typeface="+mn-lt"/>
-                <a:cs typeface="Calibri" panose="020F0502020204030204" pitchFamily="34" charset="0"/>
-              </a:rPr>
-              <a:t>: 2 a 15 anos</a:t>
-            </a:r>
-          </a:p>
-          <a:p>
-            <a:r>
-              <a:rPr lang="pt-BR" sz="4800" dirty="0" smtClean="0">
-                <a:latin typeface="+mn-lt"/>
-                <a:cs typeface="Calibri" panose="020F0502020204030204" pitchFamily="34" charset="0"/>
-              </a:rPr>
-              <a:t>- 100</a:t>
-            </a:r>
-            <a:r>
-              <a:rPr lang="pt-BR" sz="4800" dirty="0">
-                <a:latin typeface="+mn-lt"/>
-                <a:cs typeface="Calibri" panose="020F0502020204030204" pitchFamily="34" charset="0"/>
-              </a:rPr>
-              <a:t>% utilizam ferramentas de IA</a:t>
-            </a:r>
-          </a:p>
-          <a:p>
-            <a:r>
-              <a:rPr lang="pt-BR" sz="4800" dirty="0" smtClean="0">
-                <a:latin typeface="+mn-lt"/>
-                <a:cs typeface="Calibri" panose="020F0502020204030204" pitchFamily="34" charset="0"/>
-              </a:rPr>
-              <a:t>- 8 </a:t>
-            </a:r>
-            <a:r>
-              <a:rPr lang="pt-BR" sz="4800" dirty="0">
-                <a:latin typeface="+mn-lt"/>
-                <a:cs typeface="Calibri" panose="020F0502020204030204" pitchFamily="34" charset="0"/>
-              </a:rPr>
-              <a:t>temas identificados na análise</a:t>
+              <a:rPr lang="pt-BR" sz="3200" dirty="0"/>
+              <a:t> e Clarke, resultando em oito temas sobre uso de IA, revisão, dívida técnica, vulnerabilidades e sustentabilidade dos projetos. A triangulação entre as fontes aumentou a confiabilidade dos achados.</a:t>
             </a:r>
           </a:p>
         </p:txBody>
@@ -15196,7 +14976,7 @@
         </p:nvSpPr>
         <p:spPr>
           <a:xfrm>
-            <a:off x="1514121" y="17128204"/>
+            <a:off x="1524234" y="19160841"/>
             <a:ext cx="12727794" cy="923330"/>
           </a:xfrm>
           <a:prstGeom prst="rect">
@@ -15272,7 +15052,7 @@
         </p:nvSpPr>
         <p:spPr>
           <a:xfrm>
-            <a:off x="17126841" y="17025735"/>
+            <a:off x="17087825" y="19215777"/>
             <a:ext cx="12727794" cy="923330"/>
           </a:xfrm>
           <a:prstGeom prst="rect">
@@ -15310,7 +15090,7 @@
         </p:nvSpPr>
         <p:spPr>
           <a:xfrm>
-            <a:off x="17126841" y="25376977"/>
+            <a:off x="17087825" y="29222591"/>
             <a:ext cx="12727794" cy="923330"/>
           </a:xfrm>
           <a:prstGeom prst="rect">
@@ -15348,7 +15128,7 @@
         </p:nvSpPr>
         <p:spPr>
           <a:xfrm>
-            <a:off x="1514121" y="25426908"/>
+            <a:off x="1509064" y="30565601"/>
             <a:ext cx="12727794" cy="923330"/>
           </a:xfrm>
           <a:prstGeom prst="rect">
@@ -15413,433 +15193,6 @@
               </a:rPr>
               <a:t>INTRODUÇÃO</a:t>
             </a:r>
-          </a:p>
-        </p:txBody>
-      </p:sp>
-      <p:sp>
-        <p:nvSpPr>
-          <p:cNvPr id="40" name="Google Shape;95;p13"/>
-          <p:cNvSpPr txBox="1"/>
-          <p:nvPr/>
-        </p:nvSpPr>
-        <p:spPr>
-          <a:xfrm>
-            <a:off x="17126841" y="27361063"/>
-            <a:ext cx="13315577" cy="9601183"/>
-          </a:xfrm>
-          <a:prstGeom prst="rect">
-            <a:avLst/>
-          </a:prstGeom>
-          <a:noFill/>
-          <a:ln>
-            <a:noFill/>
-          </a:ln>
-        </p:spPr>
-        <p:txBody>
-          <a:bodyPr spcFirstLastPara="1" wrap="square" lIns="91425" tIns="45700" rIns="91425" bIns="45700" anchor="t" anchorCtr="0">
-            <a:noAutofit/>
-          </a:bodyPr>
-          <a:lstStyle/>
-          <a:p>
-            <a:pPr marR="0" lvl="0" algn="l" rtl="0">
-              <a:spcBef>
-                <a:spcPts val="0"/>
-              </a:spcBef>
-              <a:spcAft>
-                <a:spcPts val="0"/>
-              </a:spcAft>
-              <a:buClr>
-                <a:schemeClr val="dk1"/>
-              </a:buClr>
-              <a:buSzPts val="7200"/>
-            </a:pPr>
-            <a:r>
-              <a:rPr lang="pt-BR" sz="4000" b="1" u="sng" dirty="0">
-                <a:solidFill>
-                  <a:srgbClr val="FF0000"/>
-                </a:solidFill>
-                <a:latin typeface="Calibri" panose="020F0502020204030204"/>
-                <a:ea typeface="Calibri" panose="020F0502020204030204"/>
-                <a:cs typeface="Calibri" panose="020F0502020204030204"/>
-                <a:sym typeface="Calibri" panose="020F0502020204030204"/>
-              </a:rPr>
-              <a:t>ORIENTAÇÕES</a:t>
-            </a:r>
-          </a:p>
-          <a:p>
-            <a:pPr marL="914400" marR="0" lvl="0" indent="-1066800" algn="l" rtl="0">
-              <a:spcBef>
-                <a:spcPts val="0"/>
-              </a:spcBef>
-              <a:spcAft>
-                <a:spcPts val="0"/>
-              </a:spcAft>
-              <a:buClr>
-                <a:schemeClr val="dk1"/>
-              </a:buClr>
-              <a:buSzPts val="7200"/>
-              <a:buFont typeface="Noto Sans Symbols"/>
-              <a:buChar char="❖"/>
-            </a:pPr>
-            <a:endParaRPr lang="pt-BR" sz="4000" dirty="0">
-              <a:solidFill>
-                <a:schemeClr val="dk1"/>
-              </a:solidFill>
-              <a:latin typeface="Calibri" panose="020F0502020204030204"/>
-              <a:ea typeface="Calibri" panose="020F0502020204030204"/>
-              <a:cs typeface="Calibri" panose="020F0502020204030204"/>
-              <a:sym typeface="Calibri" panose="020F0502020204030204"/>
-            </a:endParaRPr>
-          </a:p>
-          <a:p>
-            <a:pPr marL="914400" marR="0" lvl="0" indent="-1066800" algn="l" rtl="0">
-              <a:spcBef>
-                <a:spcPts val="0"/>
-              </a:spcBef>
-              <a:spcAft>
-                <a:spcPts val="0"/>
-              </a:spcAft>
-              <a:buClr>
-                <a:schemeClr val="dk1"/>
-              </a:buClr>
-              <a:buSzPts val="7200"/>
-              <a:buFont typeface="Noto Sans Symbols"/>
-              <a:buChar char="❖"/>
-            </a:pPr>
-            <a:r>
-              <a:rPr lang="pt-BR" sz="4000" dirty="0">
-                <a:solidFill>
-                  <a:schemeClr val="dk1"/>
-                </a:solidFill>
-                <a:latin typeface="Calibri" panose="020F0502020204030204"/>
-                <a:ea typeface="Calibri" panose="020F0502020204030204"/>
-                <a:cs typeface="Calibri" panose="020F0502020204030204"/>
-                <a:sym typeface="Calibri" panose="020F0502020204030204"/>
-              </a:rPr>
-              <a:t>Títulos do conteúdo devem ser em fonte ARIAL tamanho </a:t>
-            </a:r>
-            <a:r>
-              <a:rPr lang="pt-BR" sz="4000" dirty="0" err="1">
-                <a:solidFill>
-                  <a:schemeClr val="dk1"/>
-                </a:solidFill>
-                <a:latin typeface="Calibri" panose="020F0502020204030204"/>
-                <a:ea typeface="Calibri" panose="020F0502020204030204"/>
-                <a:cs typeface="Calibri" panose="020F0502020204030204"/>
-                <a:sym typeface="Calibri" panose="020F0502020204030204"/>
-              </a:rPr>
-              <a:t>max</a:t>
-            </a:r>
-            <a:r>
-              <a:rPr lang="pt-BR" sz="4000" dirty="0">
-                <a:solidFill>
-                  <a:schemeClr val="dk1"/>
-                </a:solidFill>
-                <a:latin typeface="Calibri" panose="020F0502020204030204"/>
-                <a:ea typeface="Calibri" panose="020F0502020204030204"/>
-                <a:cs typeface="Calibri" panose="020F0502020204030204"/>
-                <a:sym typeface="Calibri" panose="020F0502020204030204"/>
-              </a:rPr>
-              <a:t>. 54.</a:t>
-            </a:r>
-            <a:endParaRPr sz="4000" dirty="0"/>
-          </a:p>
-          <a:p>
-            <a:pPr marL="914400" marR="0" lvl="0" indent="-1066800" algn="l" rtl="0">
-              <a:spcBef>
-                <a:spcPts val="0"/>
-              </a:spcBef>
-              <a:spcAft>
-                <a:spcPts val="0"/>
-              </a:spcAft>
-              <a:buClr>
-                <a:schemeClr val="dk1"/>
-              </a:buClr>
-              <a:buSzPts val="7200"/>
-              <a:buFont typeface="Noto Sans Symbols"/>
-              <a:buChar char="❖"/>
-            </a:pPr>
-            <a:r>
-              <a:rPr lang="pt-BR" sz="4000" dirty="0">
-                <a:solidFill>
-                  <a:schemeClr val="dk1"/>
-                </a:solidFill>
-                <a:latin typeface="Calibri" panose="020F0502020204030204"/>
-                <a:ea typeface="Calibri" panose="020F0502020204030204"/>
-                <a:cs typeface="Calibri" panose="020F0502020204030204"/>
-                <a:sym typeface="Calibri" panose="020F0502020204030204"/>
-              </a:rPr>
-              <a:t>Textos de conteúdo devem ter a fonte ARIAL tamanho min. 21.</a:t>
-            </a:r>
-            <a:endParaRPr sz="4000" dirty="0"/>
-          </a:p>
-          <a:p>
-            <a:pPr marL="914400" marR="0" lvl="0" indent="-1066800" algn="l" rtl="0">
-              <a:spcBef>
-                <a:spcPts val="0"/>
-              </a:spcBef>
-              <a:spcAft>
-                <a:spcPts val="0"/>
-              </a:spcAft>
-              <a:buClr>
-                <a:srgbClr val="FF0000"/>
-              </a:buClr>
-              <a:buSzPts val="7200"/>
-              <a:buFont typeface="Noto Sans Symbols"/>
-              <a:buChar char="❖"/>
-            </a:pPr>
-            <a:r>
-              <a:rPr lang="pt-BR" sz="4000" b="1" dirty="0">
-                <a:solidFill>
-                  <a:srgbClr val="FF0000"/>
-                </a:solidFill>
-                <a:latin typeface="Calibri" panose="020F0502020204030204"/>
-                <a:ea typeface="Calibri" panose="020F0502020204030204"/>
-                <a:cs typeface="Calibri" panose="020F0502020204030204"/>
-                <a:sym typeface="Calibri" panose="020F0502020204030204"/>
-              </a:rPr>
-              <a:t>Se o conteúdo for maior esses padrões podem ser alterados “desde que possam ser lidos até 1 METRO de distância”.</a:t>
-            </a:r>
-          </a:p>
-          <a:p>
-            <a:pPr lvl="0"/>
-            <a:r>
-              <a:rPr lang="pt-BR" sz="4000" b="1" dirty="0">
-                <a:solidFill>
-                  <a:schemeClr val="dk1"/>
-                </a:solidFill>
-                <a:latin typeface="Calibri" panose="020F0502020204030204"/>
-                <a:ea typeface="Calibri" panose="020F0502020204030204"/>
-                <a:cs typeface="Calibri" panose="020F0502020204030204"/>
-                <a:sym typeface="Calibri" panose="020F0502020204030204"/>
-              </a:rPr>
-              <a:t>No banner deve ter os campos de:</a:t>
-            </a:r>
-            <a:endParaRPr lang="pt-BR" sz="4000" dirty="0"/>
-          </a:p>
-          <a:p>
-            <a:pPr marL="1143000" lvl="0" indent="-1257300">
-              <a:buClr>
-                <a:schemeClr val="dk1"/>
-              </a:buClr>
-              <a:buSzPts val="7200"/>
-              <a:buFont typeface="Arial" panose="020B0604020202020204"/>
-              <a:buChar char="•"/>
-            </a:pPr>
-            <a:r>
-              <a:rPr lang="pt-BR" sz="4000" b="1" dirty="0">
-                <a:solidFill>
-                  <a:schemeClr val="dk1"/>
-                </a:solidFill>
-                <a:latin typeface="Calibri" panose="020F0502020204030204"/>
-                <a:ea typeface="Calibri" panose="020F0502020204030204"/>
-                <a:cs typeface="Calibri" panose="020F0502020204030204"/>
-                <a:sym typeface="Calibri" panose="020F0502020204030204"/>
-              </a:rPr>
-              <a:t>Introdução</a:t>
-            </a:r>
-            <a:endParaRPr lang="pt-BR" sz="4000" dirty="0"/>
-          </a:p>
-          <a:p>
-            <a:pPr marL="1143000" lvl="0" indent="-1257300">
-              <a:buClr>
-                <a:schemeClr val="dk1"/>
-              </a:buClr>
-              <a:buSzPts val="7200"/>
-              <a:buFont typeface="Arial" panose="020B0604020202020204"/>
-              <a:buChar char="•"/>
-            </a:pPr>
-            <a:r>
-              <a:rPr lang="pt-BR" sz="4000" b="1" dirty="0">
-                <a:solidFill>
-                  <a:schemeClr val="dk1"/>
-                </a:solidFill>
-                <a:latin typeface="Calibri" panose="020F0502020204030204"/>
-                <a:ea typeface="Calibri" panose="020F0502020204030204"/>
-                <a:cs typeface="Calibri" panose="020F0502020204030204"/>
-                <a:sym typeface="Calibri" panose="020F0502020204030204"/>
-              </a:rPr>
-              <a:t>Objetivo(s)</a:t>
-            </a:r>
-            <a:endParaRPr lang="pt-BR" sz="4000" dirty="0"/>
-          </a:p>
-          <a:p>
-            <a:pPr marL="1143000" lvl="0" indent="-1257300">
-              <a:buClr>
-                <a:schemeClr val="dk1"/>
-              </a:buClr>
-              <a:buSzPts val="7200"/>
-              <a:buFont typeface="Arial" panose="020B0604020202020204"/>
-              <a:buChar char="•"/>
-            </a:pPr>
-            <a:r>
-              <a:rPr lang="pt-BR" sz="4000" b="1" dirty="0">
-                <a:solidFill>
-                  <a:schemeClr val="dk1"/>
-                </a:solidFill>
-                <a:latin typeface="Calibri" panose="020F0502020204030204"/>
-                <a:ea typeface="Calibri" panose="020F0502020204030204"/>
-                <a:cs typeface="Calibri" panose="020F0502020204030204"/>
-                <a:sym typeface="Calibri" panose="020F0502020204030204"/>
-              </a:rPr>
-              <a:t>Metodologia</a:t>
-            </a:r>
-            <a:endParaRPr lang="pt-BR" sz="4000" dirty="0"/>
-          </a:p>
-          <a:p>
-            <a:pPr marL="1143000" lvl="0" indent="-1257300">
-              <a:buClr>
-                <a:schemeClr val="dk1"/>
-              </a:buClr>
-              <a:buSzPts val="7200"/>
-              <a:buFont typeface="Arial" panose="020B0604020202020204"/>
-              <a:buChar char="•"/>
-            </a:pPr>
-            <a:r>
-              <a:rPr lang="pt-BR" sz="4000" b="1" dirty="0">
-                <a:solidFill>
-                  <a:schemeClr val="dk1"/>
-                </a:solidFill>
-                <a:latin typeface="Calibri" panose="020F0502020204030204"/>
-                <a:ea typeface="Calibri" panose="020F0502020204030204"/>
-                <a:cs typeface="Calibri" panose="020F0502020204030204"/>
-                <a:sym typeface="Calibri" panose="020F0502020204030204"/>
-              </a:rPr>
-              <a:t>Discussão e Resultado(s)</a:t>
-            </a:r>
-            <a:endParaRPr lang="pt-BR" sz="4000" dirty="0"/>
-          </a:p>
-          <a:p>
-            <a:pPr marL="1143000" lvl="0" indent="-1257300">
-              <a:buClr>
-                <a:schemeClr val="dk1"/>
-              </a:buClr>
-              <a:buSzPts val="7200"/>
-              <a:buFont typeface="Arial" panose="020B0604020202020204"/>
-              <a:buChar char="•"/>
-            </a:pPr>
-            <a:r>
-              <a:rPr lang="pt-BR" sz="4000" b="1" dirty="0">
-                <a:solidFill>
-                  <a:schemeClr val="dk1"/>
-                </a:solidFill>
-                <a:latin typeface="Calibri" panose="020F0502020204030204"/>
-                <a:ea typeface="Calibri" panose="020F0502020204030204"/>
-                <a:cs typeface="Calibri" panose="020F0502020204030204"/>
-                <a:sym typeface="Calibri" panose="020F0502020204030204"/>
-              </a:rPr>
-              <a:t>Conclusão ou Considerações</a:t>
-            </a:r>
-            <a:endParaRPr lang="pt-BR" sz="4000" dirty="0"/>
-          </a:p>
-          <a:p>
-            <a:pPr marL="1143000" lvl="0" indent="-1257300">
-              <a:buClr>
-                <a:schemeClr val="dk1"/>
-              </a:buClr>
-              <a:buSzPts val="7200"/>
-              <a:buFont typeface="Arial" panose="020B0604020202020204"/>
-              <a:buChar char="•"/>
-            </a:pPr>
-            <a:r>
-              <a:rPr lang="pt-BR" sz="4000" b="1" dirty="0">
-                <a:solidFill>
-                  <a:schemeClr val="dk1"/>
-                </a:solidFill>
-                <a:latin typeface="Calibri" panose="020F0502020204030204"/>
-                <a:ea typeface="Calibri" panose="020F0502020204030204"/>
-                <a:cs typeface="Calibri" panose="020F0502020204030204"/>
-                <a:sym typeface="Calibri" panose="020F0502020204030204"/>
-              </a:rPr>
-              <a:t>Referências utilizadas no Banner</a:t>
-            </a:r>
-          </a:p>
-          <a:p>
-            <a:pPr marL="1143000" lvl="0" indent="-1257300">
-              <a:buClr>
-                <a:schemeClr val="dk1"/>
-              </a:buClr>
-              <a:buSzPts val="7200"/>
-              <a:buFont typeface="Arial" panose="020B0604020202020204"/>
-              <a:buChar char="•"/>
-            </a:pPr>
-            <a:endParaRPr lang="pt-BR" sz="4000" b="1" dirty="0">
-              <a:solidFill>
-                <a:schemeClr val="dk1"/>
-              </a:solidFill>
-              <a:latin typeface="Calibri" panose="020F0502020204030204"/>
-              <a:sym typeface="Calibri" panose="020F0502020204030204"/>
-            </a:endParaRPr>
-          </a:p>
-          <a:p>
-            <a:pPr marL="1143000" indent="-1257300">
-              <a:buClr>
-                <a:schemeClr val="dk1"/>
-              </a:buClr>
-              <a:buSzPts val="7200"/>
-              <a:buFont typeface="Arial" panose="020B0604020202020204"/>
-              <a:buChar char="•"/>
-            </a:pPr>
-            <a:r>
-              <a:rPr lang="pt-BR" sz="4000" b="1" dirty="0">
-                <a:solidFill>
-                  <a:srgbClr val="FF0000"/>
-                </a:solidFill>
-                <a:latin typeface="Calibri" panose="020F0502020204030204"/>
-                <a:ea typeface="Calibri" panose="020F0502020204030204"/>
-                <a:cs typeface="Calibri" panose="020F0502020204030204"/>
-                <a:sym typeface="Calibri" panose="020F0502020204030204"/>
-              </a:rPr>
-              <a:t>Imprimir no tamanho 90x120cm colorido</a:t>
-            </a:r>
-          </a:p>
-          <a:p>
-            <a:pPr marL="1143000" lvl="0" indent="-1257300">
-              <a:buClr>
-                <a:schemeClr val="dk1"/>
-              </a:buClr>
-              <a:buSzPts val="7200"/>
-              <a:buFont typeface="Arial" panose="020B0604020202020204"/>
-              <a:buChar char="•"/>
-            </a:pPr>
-            <a:endParaRPr lang="pt-BR" sz="4000" dirty="0"/>
-          </a:p>
-          <a:p>
-            <a:pPr marL="914400" marR="0" lvl="0" indent="-1066800" algn="l" rtl="0">
-              <a:spcBef>
-                <a:spcPts val="0"/>
-              </a:spcBef>
-              <a:spcAft>
-                <a:spcPts val="0"/>
-              </a:spcAft>
-              <a:buClr>
-                <a:srgbClr val="FF0000"/>
-              </a:buClr>
-              <a:buSzPts val="7200"/>
-              <a:buFont typeface="Noto Sans Symbols"/>
-              <a:buChar char="❖"/>
-            </a:pPr>
-            <a:endParaRPr sz="4000" dirty="0"/>
-          </a:p>
-          <a:p>
-            <a:pPr marL="0" marR="0" lvl="0" indent="0" algn="ctr" rtl="0">
-              <a:spcBef>
-                <a:spcPts val="0"/>
-              </a:spcBef>
-              <a:spcAft>
-                <a:spcPts val="0"/>
-              </a:spcAft>
-              <a:buNone/>
-            </a:pPr>
-            <a:endParaRPr sz="4000" dirty="0">
-              <a:solidFill>
-                <a:schemeClr val="dk1"/>
-              </a:solidFill>
-              <a:latin typeface="Calibri" panose="020F0502020204030204"/>
-              <a:ea typeface="Calibri" panose="020F0502020204030204"/>
-              <a:cs typeface="Calibri" panose="020F0502020204030204"/>
-              <a:sym typeface="Calibri" panose="020F0502020204030204"/>
-            </a:endParaRPr>
           </a:p>
         </p:txBody>
       </p:sp>
@@ -16010,6 +15363,617 @@
           </a:extLst>
         </p:spPr>
       </p:pic>
+      <p:sp>
+        <p:nvSpPr>
+          <p:cNvPr id="23" name="Google Shape;89;p13"/>
+          <p:cNvSpPr txBox="1"/>
+          <p:nvPr/>
+        </p:nvSpPr>
+        <p:spPr>
+          <a:xfrm>
+            <a:off x="16996382" y="20231935"/>
+            <a:ext cx="12717681" cy="7325443"/>
+          </a:xfrm>
+          <a:prstGeom prst="rect">
+            <a:avLst/>
+          </a:prstGeom>
+          <a:noFill/>
+          <a:ln>
+            <a:noFill/>
+          </a:ln>
+        </p:spPr>
+        <p:txBody>
+          <a:bodyPr spcFirstLastPara="1" wrap="square" lIns="91425" tIns="45700" rIns="91425" bIns="45700" anchor="t" anchorCtr="0">
+            <a:noAutofit/>
+          </a:bodyPr>
+          <a:lstStyle/>
+          <a:p>
+            <a:r>
+              <a:rPr lang="pt-BR" sz="3200" dirty="0" smtClean="0"/>
+              <a:t>O vibe </a:t>
+            </a:r>
+            <a:r>
+              <a:rPr lang="pt-BR" sz="3200" dirty="0" err="1"/>
+              <a:t>coding</a:t>
+            </a:r>
+            <a:r>
+              <a:rPr lang="pt-BR" sz="3200" dirty="0"/>
+              <a:t>, impulsionado pelo uso intenso de IA, aumenta a velocidade de desenvolvimento, mas também acelera o acúmulo de dívidas técnicas e riscos de segurança. Embora 80% dos profissionais utilizem IA diariamente, apenas 40% revisam o código gerado, criando um desequilíbrio que compromete a qualidade. Esse risco é agravado pelo “Ciclo de Validação Falso”, em que testes produzidos pela própria IA ocultam falhas reais.</a:t>
+            </a:r>
+          </a:p>
+          <a:p>
+            <a:r>
+              <a:rPr lang="pt-BR" sz="3200" dirty="0"/>
+              <a:t>Foram identificadas dívidas técnicas frequentes em documentação, código, arquitetura e testes, amplificadas pela pressão por velocidade nas empresas. A pesquisa introduz o conceito de “dívida técnica delegada” e oferece diretrizes práticas para mitigar riscos, incluindo revisão rigorosa, separação entre código e testes, documentação contínua e políticas claras de uso de IA.</a:t>
+            </a:r>
+          </a:p>
+          <a:p>
+            <a:r>
+              <a:rPr lang="pt-BR" sz="3200" dirty="0"/>
+              <a:t>A conclusão central é que o problema não está na IA, mas no uso sem revisão crítica. Produtividade sem qualidade é insustentável, e o desafio é equilibrar velocidade com responsabilidade técnica na construção de sistemas seguros e duradouros</a:t>
+            </a:r>
+            <a:r>
+              <a:rPr lang="pt-BR" sz="3200" dirty="0" smtClean="0"/>
+              <a:t>.</a:t>
+            </a:r>
+          </a:p>
+          <a:p>
+            <a:endParaRPr lang="pt-BR" sz="3200" dirty="0"/>
+          </a:p>
+        </p:txBody>
+      </p:sp>
+      <p:sp>
+        <p:nvSpPr>
+          <p:cNvPr id="24" name="Google Shape;89;p13"/>
+          <p:cNvSpPr txBox="1"/>
+          <p:nvPr/>
+        </p:nvSpPr>
+        <p:spPr>
+          <a:xfrm>
+            <a:off x="16996030" y="29698236"/>
+            <a:ext cx="12717681" cy="7325443"/>
+          </a:xfrm>
+          <a:prstGeom prst="rect">
+            <a:avLst/>
+          </a:prstGeom>
+          <a:noFill/>
+          <a:ln>
+            <a:noFill/>
+          </a:ln>
+        </p:spPr>
+        <p:txBody>
+          <a:bodyPr spcFirstLastPara="1" wrap="square" lIns="91425" tIns="45700" rIns="91425" bIns="45700" anchor="t" anchorCtr="0">
+            <a:noAutofit/>
+          </a:bodyPr>
+          <a:lstStyle/>
+          <a:p>
+            <a:endParaRPr lang="pt-BR" sz="3200" dirty="0"/>
+          </a:p>
+          <a:p>
+            <a:r>
+              <a:rPr lang="pt-BR" sz="2800" dirty="0" smtClean="0"/>
+              <a:t>ALVES, N. S. R. et al. </a:t>
+            </a:r>
+            <a:r>
+              <a:rPr lang="pt-BR" sz="2800" dirty="0" err="1" smtClean="0"/>
+              <a:t>Identification</a:t>
+            </a:r>
+            <a:r>
+              <a:rPr lang="pt-BR" sz="2800" dirty="0" smtClean="0"/>
+              <a:t> </a:t>
+            </a:r>
+            <a:r>
+              <a:rPr lang="pt-BR" sz="2800" dirty="0" err="1" smtClean="0"/>
+              <a:t>and</a:t>
+            </a:r>
+            <a:r>
+              <a:rPr lang="pt-BR" sz="2800" dirty="0" smtClean="0"/>
+              <a:t> management </a:t>
+            </a:r>
+            <a:r>
+              <a:rPr lang="pt-BR" sz="2800" dirty="0" err="1" smtClean="0"/>
+              <a:t>of</a:t>
+            </a:r>
+            <a:r>
+              <a:rPr lang="pt-BR" sz="2800" dirty="0" smtClean="0"/>
+              <a:t> </a:t>
+            </a:r>
+            <a:r>
+              <a:rPr lang="pt-BR" sz="2800" dirty="0" err="1" smtClean="0"/>
+              <a:t>technical</a:t>
+            </a:r>
+            <a:r>
+              <a:rPr lang="pt-BR" sz="2800" dirty="0" smtClean="0"/>
+              <a:t> </a:t>
+            </a:r>
+            <a:r>
+              <a:rPr lang="pt-BR" sz="2800" dirty="0" err="1" smtClean="0"/>
+              <a:t>debt</a:t>
+            </a:r>
+            <a:r>
+              <a:rPr lang="pt-BR" sz="2800" dirty="0" smtClean="0"/>
+              <a:t>: A </a:t>
+            </a:r>
+            <a:r>
+              <a:rPr lang="pt-BR" sz="2800" dirty="0" err="1" smtClean="0"/>
+              <a:t>systematic</a:t>
+            </a:r>
+            <a:r>
+              <a:rPr lang="pt-BR" sz="2800" dirty="0" smtClean="0"/>
+              <a:t> </a:t>
+            </a:r>
+            <a:r>
+              <a:rPr lang="pt-BR" sz="2800" dirty="0" err="1" smtClean="0"/>
+              <a:t>mapping</a:t>
+            </a:r>
+            <a:r>
+              <a:rPr lang="pt-BR" sz="2800" dirty="0" smtClean="0"/>
+              <a:t> </a:t>
+            </a:r>
+            <a:r>
+              <a:rPr lang="pt-BR" sz="2800" dirty="0" err="1" smtClean="0"/>
+              <a:t>study</a:t>
+            </a:r>
+            <a:r>
+              <a:rPr lang="pt-BR" sz="2800" dirty="0" smtClean="0"/>
+              <a:t>. </a:t>
+            </a:r>
+            <a:r>
+              <a:rPr lang="pt-BR" sz="2800" b="1" dirty="0" err="1" smtClean="0"/>
+              <a:t>Information</a:t>
+            </a:r>
+            <a:r>
+              <a:rPr lang="pt-BR" sz="2800" b="1" dirty="0" smtClean="0"/>
+              <a:t> </a:t>
+            </a:r>
+            <a:r>
+              <a:rPr lang="pt-BR" sz="2800" b="1" dirty="0" err="1" smtClean="0"/>
+              <a:t>and</a:t>
+            </a:r>
+            <a:r>
+              <a:rPr lang="pt-BR" sz="2800" b="1" dirty="0" smtClean="0"/>
+              <a:t> Software Technology</a:t>
+            </a:r>
+            <a:r>
+              <a:rPr lang="pt-BR" sz="2800" dirty="0" smtClean="0"/>
+              <a:t>, v. 70, p. 100-121, 2016.</a:t>
+            </a:r>
+          </a:p>
+          <a:p>
+            <a:r>
+              <a:rPr lang="pt-BR" sz="2800" dirty="0" smtClean="0"/>
+              <a:t>BARKE, S. et al. </a:t>
+            </a:r>
+            <a:r>
+              <a:rPr lang="pt-BR" sz="2800" dirty="0" err="1" smtClean="0"/>
+              <a:t>Grounded</a:t>
+            </a:r>
+            <a:r>
+              <a:rPr lang="pt-BR" sz="2800" dirty="0" smtClean="0"/>
+              <a:t> </a:t>
+            </a:r>
+            <a:r>
+              <a:rPr lang="pt-BR" sz="2800" dirty="0" err="1" smtClean="0"/>
+              <a:t>Copilot</a:t>
+            </a:r>
+            <a:r>
+              <a:rPr lang="pt-BR" sz="2800" dirty="0" smtClean="0"/>
+              <a:t>: </a:t>
+            </a:r>
+            <a:r>
+              <a:rPr lang="pt-BR" sz="2800" dirty="0" err="1" smtClean="0"/>
+              <a:t>How</a:t>
+            </a:r>
+            <a:r>
+              <a:rPr lang="pt-BR" sz="2800" dirty="0" smtClean="0"/>
+              <a:t> </a:t>
+            </a:r>
+            <a:r>
+              <a:rPr lang="pt-BR" sz="2800" dirty="0" err="1" smtClean="0"/>
+              <a:t>Programmers</a:t>
+            </a:r>
+            <a:r>
+              <a:rPr lang="pt-BR" sz="2800" dirty="0" smtClean="0"/>
+              <a:t> Interact </a:t>
+            </a:r>
+            <a:r>
+              <a:rPr lang="pt-BR" sz="2800" dirty="0" err="1" smtClean="0"/>
+              <a:t>with</a:t>
+            </a:r>
+            <a:r>
+              <a:rPr lang="pt-BR" sz="2800" dirty="0" smtClean="0"/>
+              <a:t> Code-</a:t>
+            </a:r>
+            <a:r>
+              <a:rPr lang="pt-BR" sz="2800" dirty="0" err="1" smtClean="0"/>
+              <a:t>Generating</a:t>
+            </a:r>
+            <a:r>
+              <a:rPr lang="pt-BR" sz="2800" dirty="0" smtClean="0"/>
+              <a:t> </a:t>
+            </a:r>
+            <a:r>
+              <a:rPr lang="pt-BR" sz="2800" dirty="0" err="1" smtClean="0"/>
+              <a:t>Models</a:t>
+            </a:r>
+            <a:r>
+              <a:rPr lang="pt-BR" sz="2800" dirty="0" smtClean="0"/>
+              <a:t>. </a:t>
+            </a:r>
+            <a:r>
+              <a:rPr lang="pt-BR" sz="2800" b="1" dirty="0" err="1" smtClean="0"/>
+              <a:t>Proceedings</a:t>
+            </a:r>
+            <a:r>
+              <a:rPr lang="pt-BR" sz="2800" b="1" dirty="0" smtClean="0"/>
+              <a:t> </a:t>
+            </a:r>
+            <a:r>
+              <a:rPr lang="pt-BR" sz="2800" b="1" dirty="0" err="1" smtClean="0"/>
+              <a:t>of</a:t>
+            </a:r>
+            <a:r>
+              <a:rPr lang="pt-BR" sz="2800" b="1" dirty="0" smtClean="0"/>
+              <a:t> </a:t>
+            </a:r>
+            <a:r>
+              <a:rPr lang="pt-BR" sz="2800" b="1" dirty="0" err="1" smtClean="0"/>
+              <a:t>the</a:t>
+            </a:r>
+            <a:r>
+              <a:rPr lang="pt-BR" sz="2800" b="1" dirty="0" smtClean="0"/>
+              <a:t> ACM </a:t>
+            </a:r>
+            <a:r>
+              <a:rPr lang="pt-BR" sz="2800" b="1" dirty="0" err="1" smtClean="0"/>
+              <a:t>on</a:t>
+            </a:r>
+            <a:r>
+              <a:rPr lang="pt-BR" sz="2800" b="1" dirty="0" smtClean="0"/>
+              <a:t> </a:t>
+            </a:r>
+            <a:r>
+              <a:rPr lang="pt-BR" sz="2800" b="1" dirty="0" err="1" smtClean="0"/>
+              <a:t>Programming</a:t>
+            </a:r>
+            <a:r>
+              <a:rPr lang="pt-BR" sz="2800" b="1" dirty="0" smtClean="0"/>
+              <a:t> </a:t>
+            </a:r>
+            <a:r>
+              <a:rPr lang="pt-BR" sz="2800" b="1" dirty="0" err="1" smtClean="0"/>
+              <a:t>Languages</a:t>
+            </a:r>
+            <a:r>
+              <a:rPr lang="pt-BR" sz="2800" dirty="0" smtClean="0"/>
+              <a:t>, v. 7, n. OOPSLA1, p. 85-111, 2023.</a:t>
+            </a:r>
+          </a:p>
+          <a:p>
+            <a:r>
+              <a:rPr lang="pt-BR" sz="2800" dirty="0" smtClean="0"/>
+              <a:t>BRAUN, V.; CLARKE, V. </a:t>
+            </a:r>
+            <a:r>
+              <a:rPr lang="pt-BR" sz="2800" dirty="0" err="1" smtClean="0"/>
+              <a:t>Using</a:t>
+            </a:r>
+            <a:r>
+              <a:rPr lang="pt-BR" sz="2800" dirty="0" smtClean="0"/>
+              <a:t> </a:t>
+            </a:r>
+            <a:r>
+              <a:rPr lang="pt-BR" sz="2800" dirty="0" err="1" smtClean="0"/>
+              <a:t>thematic</a:t>
+            </a:r>
+            <a:r>
+              <a:rPr lang="pt-BR" sz="2800" dirty="0" smtClean="0"/>
+              <a:t> </a:t>
+            </a:r>
+            <a:r>
+              <a:rPr lang="pt-BR" sz="2800" dirty="0" err="1" smtClean="0"/>
+              <a:t>analysis</a:t>
+            </a:r>
+            <a:r>
+              <a:rPr lang="pt-BR" sz="2800" dirty="0" smtClean="0"/>
+              <a:t> in </a:t>
+            </a:r>
+            <a:r>
+              <a:rPr lang="pt-BR" sz="2800" dirty="0" err="1" smtClean="0"/>
+              <a:t>psychology</a:t>
+            </a:r>
+            <a:r>
+              <a:rPr lang="pt-BR" sz="2800" dirty="0" smtClean="0"/>
+              <a:t>. </a:t>
+            </a:r>
+            <a:r>
+              <a:rPr lang="pt-BR" sz="2800" b="1" dirty="0" err="1" smtClean="0"/>
+              <a:t>Qualitative</a:t>
+            </a:r>
+            <a:r>
+              <a:rPr lang="pt-BR" sz="2800" b="1" dirty="0" smtClean="0"/>
+              <a:t> </a:t>
+            </a:r>
+            <a:r>
+              <a:rPr lang="pt-BR" sz="2800" b="1" dirty="0" err="1" smtClean="0"/>
+              <a:t>Research</a:t>
+            </a:r>
+            <a:r>
+              <a:rPr lang="pt-BR" sz="2800" b="1" dirty="0" smtClean="0"/>
+              <a:t> in </a:t>
+            </a:r>
+            <a:r>
+              <a:rPr lang="pt-BR" sz="2800" b="1" dirty="0" err="1" smtClean="0"/>
+              <a:t>Psychology</a:t>
+            </a:r>
+            <a:r>
+              <a:rPr lang="pt-BR" sz="2800" dirty="0" smtClean="0"/>
+              <a:t>, v. 3, n. 2, p. 77-101, 2006.</a:t>
+            </a:r>
+          </a:p>
+          <a:p>
+            <a:r>
+              <a:rPr lang="pt-BR" sz="2800" dirty="0" smtClean="0"/>
+              <a:t>CUNNINGHAM, W. The </a:t>
+            </a:r>
+            <a:r>
+              <a:rPr lang="pt-BR" sz="2800" dirty="0" err="1" smtClean="0"/>
+              <a:t>WyCash</a:t>
+            </a:r>
+            <a:r>
+              <a:rPr lang="pt-BR" sz="2800" dirty="0" smtClean="0"/>
+              <a:t> Portfolio Management System. In: OOPSLA '92 EXPERIENCE REPORT, 1992, Vancouver. </a:t>
+            </a:r>
+            <a:r>
+              <a:rPr lang="pt-BR" sz="2800" b="1" dirty="0" err="1" smtClean="0"/>
+              <a:t>Proceedings</a:t>
+            </a:r>
+            <a:r>
+              <a:rPr lang="pt-BR" sz="2800" b="1" dirty="0" smtClean="0"/>
+              <a:t>...</a:t>
+            </a:r>
+            <a:r>
+              <a:rPr lang="pt-BR" sz="2800" dirty="0" smtClean="0"/>
+              <a:t> New York: ACM, 1992. p. 29-30.</a:t>
+            </a:r>
+          </a:p>
+          <a:p>
+            <a:r>
+              <a:rPr lang="pt-BR" sz="2800" dirty="0" smtClean="0"/>
+              <a:t>DAKHEL, A. M. et al. GitHub </a:t>
+            </a:r>
+            <a:r>
+              <a:rPr lang="pt-BR" sz="2800" dirty="0" err="1" smtClean="0"/>
+              <a:t>Copilot</a:t>
+            </a:r>
+            <a:r>
+              <a:rPr lang="pt-BR" sz="2800" dirty="0" smtClean="0"/>
+              <a:t> AI </a:t>
+            </a:r>
+            <a:r>
+              <a:rPr lang="pt-BR" sz="2800" dirty="0" err="1" smtClean="0"/>
+              <a:t>pair</a:t>
+            </a:r>
+            <a:r>
+              <a:rPr lang="pt-BR" sz="2800" dirty="0" smtClean="0"/>
+              <a:t> </a:t>
+            </a:r>
+            <a:r>
+              <a:rPr lang="pt-BR" sz="2800" dirty="0" err="1" smtClean="0"/>
+              <a:t>programmer</a:t>
+            </a:r>
+            <a:r>
+              <a:rPr lang="pt-BR" sz="2800" dirty="0" smtClean="0"/>
+              <a:t>: </a:t>
+            </a:r>
+            <a:r>
+              <a:rPr lang="pt-BR" sz="2800" dirty="0" err="1" smtClean="0"/>
+              <a:t>Asset</a:t>
+            </a:r>
+            <a:r>
+              <a:rPr lang="pt-BR" sz="2800" dirty="0" smtClean="0"/>
+              <a:t> </a:t>
+            </a:r>
+            <a:r>
+              <a:rPr lang="pt-BR" sz="2800" dirty="0" err="1" smtClean="0"/>
+              <a:t>or</a:t>
+            </a:r>
+            <a:r>
+              <a:rPr lang="pt-BR" sz="2800" dirty="0" smtClean="0"/>
+              <a:t> </a:t>
+            </a:r>
+            <a:r>
+              <a:rPr lang="pt-BR" sz="2800" dirty="0" err="1" smtClean="0"/>
+              <a:t>Liability</a:t>
+            </a:r>
+            <a:r>
+              <a:rPr lang="pt-BR" sz="2800" dirty="0" smtClean="0"/>
+              <a:t>? </a:t>
+            </a:r>
+            <a:r>
+              <a:rPr lang="pt-BR" sz="2800" b="1" dirty="0" err="1" smtClean="0"/>
+              <a:t>Journal</a:t>
+            </a:r>
+            <a:r>
+              <a:rPr lang="pt-BR" sz="2800" b="1" dirty="0" smtClean="0"/>
+              <a:t> </a:t>
+            </a:r>
+            <a:r>
+              <a:rPr lang="pt-BR" sz="2800" b="1" dirty="0" err="1" smtClean="0"/>
+              <a:t>of</a:t>
+            </a:r>
+            <a:r>
+              <a:rPr lang="pt-BR" sz="2800" b="1" dirty="0" smtClean="0"/>
+              <a:t> Systems </a:t>
+            </a:r>
+            <a:r>
+              <a:rPr lang="pt-BR" sz="2800" b="1" dirty="0" err="1" smtClean="0"/>
+              <a:t>and</a:t>
+            </a:r>
+            <a:r>
+              <a:rPr lang="pt-BR" sz="2800" b="1" dirty="0" smtClean="0"/>
+              <a:t> Software</a:t>
+            </a:r>
+            <a:r>
+              <a:rPr lang="pt-BR" sz="2800" dirty="0" smtClean="0"/>
+              <a:t>, v. 203, 111734, 2023.</a:t>
+            </a:r>
+          </a:p>
+          <a:p>
+            <a:r>
+              <a:rPr lang="pt-BR" sz="2800" dirty="0" smtClean="0"/>
+              <a:t>KRUCHTEN, P.; NORD, R. L.; OZKAYA, I. </a:t>
+            </a:r>
+            <a:r>
+              <a:rPr lang="pt-BR" sz="2800" dirty="0" err="1" smtClean="0"/>
+              <a:t>Technical</a:t>
+            </a:r>
+            <a:r>
+              <a:rPr lang="pt-BR" sz="2800" dirty="0" smtClean="0"/>
+              <a:t> </a:t>
+            </a:r>
+            <a:r>
+              <a:rPr lang="pt-BR" sz="2800" dirty="0" err="1" smtClean="0"/>
+              <a:t>Debt</a:t>
+            </a:r>
+            <a:r>
+              <a:rPr lang="pt-BR" sz="2800" dirty="0" smtClean="0"/>
+              <a:t>: </a:t>
+            </a:r>
+            <a:r>
+              <a:rPr lang="pt-BR" sz="2800" dirty="0" err="1" smtClean="0"/>
+              <a:t>From</a:t>
+            </a:r>
+            <a:r>
+              <a:rPr lang="pt-BR" sz="2800" dirty="0" smtClean="0"/>
+              <a:t> </a:t>
+            </a:r>
+            <a:r>
+              <a:rPr lang="pt-BR" sz="2800" dirty="0" err="1" smtClean="0"/>
+              <a:t>Metaphor</a:t>
+            </a:r>
+            <a:r>
+              <a:rPr lang="pt-BR" sz="2800" dirty="0" smtClean="0"/>
+              <a:t> </a:t>
+            </a:r>
+            <a:r>
+              <a:rPr lang="pt-BR" sz="2800" dirty="0" err="1" smtClean="0"/>
+              <a:t>to</a:t>
+            </a:r>
+            <a:r>
+              <a:rPr lang="pt-BR" sz="2800" dirty="0" smtClean="0"/>
+              <a:t> </a:t>
+            </a:r>
+            <a:r>
+              <a:rPr lang="pt-BR" sz="2800" dirty="0" err="1" smtClean="0"/>
+              <a:t>Theory</a:t>
+            </a:r>
+            <a:r>
+              <a:rPr lang="pt-BR" sz="2800" dirty="0" smtClean="0"/>
+              <a:t> </a:t>
+            </a:r>
+            <a:r>
+              <a:rPr lang="pt-BR" sz="2800" dirty="0" err="1" smtClean="0"/>
+              <a:t>and</a:t>
+            </a:r>
+            <a:r>
+              <a:rPr lang="pt-BR" sz="2800" dirty="0" smtClean="0"/>
+              <a:t> </a:t>
+            </a:r>
+            <a:r>
+              <a:rPr lang="pt-BR" sz="2800" dirty="0" err="1" smtClean="0"/>
+              <a:t>Practice</a:t>
+            </a:r>
+            <a:r>
+              <a:rPr lang="pt-BR" sz="2800" dirty="0" smtClean="0"/>
+              <a:t>. </a:t>
+            </a:r>
+            <a:r>
+              <a:rPr lang="pt-BR" sz="2800" b="1" dirty="0" smtClean="0"/>
+              <a:t>IEEE Software</a:t>
+            </a:r>
+            <a:r>
+              <a:rPr lang="pt-BR" sz="2800" dirty="0" smtClean="0"/>
+              <a:t>, v. 29, n. 6, p. 18-21, nov./dez. 2012.</a:t>
+            </a:r>
+          </a:p>
+          <a:p>
+            <a:r>
+              <a:rPr lang="pt-BR" sz="2800" dirty="0" err="1" smtClean="0"/>
+              <a:t>McGRAW</a:t>
+            </a:r>
+            <a:r>
+              <a:rPr lang="pt-BR" sz="2800" dirty="0" smtClean="0"/>
+              <a:t>, G. </a:t>
+            </a:r>
+            <a:r>
+              <a:rPr lang="pt-BR" sz="2800" b="1" dirty="0" smtClean="0"/>
+              <a:t>Software Security: </a:t>
+            </a:r>
+            <a:r>
+              <a:rPr lang="pt-BR" sz="2800" b="1" dirty="0" err="1" smtClean="0"/>
+              <a:t>Building</a:t>
+            </a:r>
+            <a:r>
+              <a:rPr lang="pt-BR" sz="2800" b="1" dirty="0" smtClean="0"/>
+              <a:t> Security In.</a:t>
+            </a:r>
+            <a:r>
+              <a:rPr lang="pt-BR" sz="2800" dirty="0" smtClean="0"/>
+              <a:t> Boston: </a:t>
+            </a:r>
+            <a:r>
+              <a:rPr lang="pt-BR" sz="2800" dirty="0" err="1" smtClean="0"/>
+              <a:t>Addison</a:t>
+            </a:r>
+            <a:r>
+              <a:rPr lang="pt-BR" sz="2800" dirty="0" smtClean="0"/>
+              <a:t>-Wesley Professional, 2006. 448 p.</a:t>
+            </a:r>
+          </a:p>
+          <a:p>
+            <a:r>
+              <a:rPr lang="pt-BR" sz="2800" dirty="0" smtClean="0"/>
+              <a:t>SOMMERVILLE, I. </a:t>
+            </a:r>
+            <a:r>
+              <a:rPr lang="pt-BR" sz="2800" b="1" dirty="0" smtClean="0"/>
+              <a:t>Engenharia de Software.</a:t>
+            </a:r>
+            <a:r>
+              <a:rPr lang="pt-BR" sz="2800" dirty="0" smtClean="0"/>
+              <a:t> 10. ed. Tradução de Ivan </a:t>
+            </a:r>
+            <a:r>
+              <a:rPr lang="pt-BR" sz="2800" dirty="0" err="1" smtClean="0"/>
+              <a:t>Bosnic</a:t>
+            </a:r>
+            <a:r>
+              <a:rPr lang="pt-BR" sz="2800" dirty="0" smtClean="0"/>
+              <a:t> e </a:t>
+            </a:r>
+            <a:r>
+              <a:rPr lang="pt-BR" sz="2800" dirty="0" err="1" smtClean="0"/>
+              <a:t>Kalinka</a:t>
+            </a:r>
+            <a:r>
+              <a:rPr lang="pt-BR" sz="2800" dirty="0" smtClean="0"/>
+              <a:t> Gonçalves de Oliveira. São Paulo: Pearson </a:t>
+            </a:r>
+            <a:r>
+              <a:rPr lang="pt-BR" sz="2800" dirty="0" err="1" smtClean="0"/>
+              <a:t>Education</a:t>
+            </a:r>
+            <a:r>
+              <a:rPr lang="pt-BR" sz="2800" dirty="0" smtClean="0"/>
+              <a:t> do Brasil, 2016. 568 p.</a:t>
+            </a:r>
+          </a:p>
+          <a:p>
+            <a:endParaRPr lang="pt-BR" sz="2800" dirty="0"/>
+          </a:p>
+        </p:txBody>
+      </p:sp>
     </p:spTree>
   </p:cSld>
   <p:clrMapOvr>

--- a/banner_tcc.pptx
+++ b/banner_tcc.pptx
@@ -14370,8 +14370,17 @@
                 <a:cs typeface="Calibri" panose="020F0502020204030204"/>
                 <a:sym typeface="Calibri" panose="020F0502020204030204"/>
               </a:rPr>
-              <a:t>Projeto Final de Curso</a:t>
-            </a:r>
+              <a:t>Trabalho de Conclusão de Curso</a:t>
+            </a:r>
+            <a:endParaRPr lang="pt-BR" sz="4800" b="0" i="0" u="none" strike="noStrike" cap="none" dirty="0" smtClean="0">
+              <a:solidFill>
+                <a:schemeClr val="lt1"/>
+              </a:solidFill>
+              <a:latin typeface="Calibri" panose="020F0502020204030204"/>
+              <a:ea typeface="Calibri" panose="020F0502020204030204"/>
+              <a:cs typeface="Calibri" panose="020F0502020204030204"/>
+              <a:sym typeface="Calibri" panose="020F0502020204030204"/>
+            </a:endParaRPr>
           </a:p>
           <a:p>
             <a:pPr marL="0" marR="0" lvl="0" indent="0" algn="l" rtl="0">
